--- a/files/NetSciX-25_Kunjar.pptx
+++ b/files/NetSciX-25_Kunjar.pptx
@@ -2313,7 +2313,7 @@
           <a:p>
             <a:fld id="{1356D218-C6CB-2D4E-A293-5F9B0C6ED778}" type="datetimeFigureOut">
               <a:rPr lang="en-GB" smtClean="0"/>
-              <a:t>14/01/2025</a:t>
+              <a:t>15/01/2025</a:t>
             </a:fld>
             <a:endParaRPr lang="en-GB"/>
           </a:p>
@@ -2626,7 +2626,7 @@
           <a:p>
             <a:r>
               <a:rPr lang="en-GB" dirty="0"/>
-              <a:t>Confounders</a:t>
+              <a:t>Work in early stages – still looking for major suggestions</a:t>
             </a:r>
           </a:p>
         </p:txBody>
@@ -2648,6 +2648,369 @@
           <a:p>
             <a:fld id="{F6516755-5A1C-7C49-BFB6-B7711A73FC00}" type="slidenum">
               <a:rPr lang="en-GB" smtClean="0"/>
+              <a:t>1</a:t>
+            </a:fld>
+            <a:endParaRPr lang="en-GB"/>
+          </a:p>
+        </p:txBody>
+      </p:sp>
+    </p:spTree>
+    <p:extLst>
+      <p:ext uri="{BB962C8B-B14F-4D97-AF65-F5344CB8AC3E}">
+        <p14:creationId xmlns:p14="http://schemas.microsoft.com/office/powerpoint/2010/main" val="1612121850"/>
+      </p:ext>
+    </p:extLst>
+  </p:cSld>
+  <p:clrMapOvr>
+    <a:masterClrMapping/>
+  </p:clrMapOvr>
+</p:notes>
+</file>
+
+<file path=ppt/notesSlides/notesSlide2.xml><?xml version="1.0" encoding="utf-8"?>
+<p:notes xmlns:a="http://schemas.openxmlformats.org/drawingml/2006/main" xmlns:r="http://schemas.openxmlformats.org/officeDocument/2006/relationships" xmlns:p="http://schemas.openxmlformats.org/presentationml/2006/main">
+  <p:cSld>
+    <p:spTree>
+      <p:nvGrpSpPr>
+        <p:cNvPr id="1" name=""/>
+        <p:cNvGrpSpPr/>
+        <p:nvPr/>
+      </p:nvGrpSpPr>
+      <p:grpSpPr>
+        <a:xfrm>
+          <a:off x="0" y="0"/>
+          <a:ext cx="0" cy="0"/>
+          <a:chOff x="0" y="0"/>
+          <a:chExt cx="0" cy="0"/>
+        </a:xfrm>
+      </p:grpSpPr>
+      <p:sp>
+        <p:nvSpPr>
+          <p:cNvPr id="2" name="Slide Image Placeholder 1"/>
+          <p:cNvSpPr>
+            <a:spLocks noGrp="1" noRot="1" noChangeAspect="1"/>
+          </p:cNvSpPr>
+          <p:nvPr>
+            <p:ph type="sldImg"/>
+          </p:nvPr>
+        </p:nvSpPr>
+        <p:spPr/>
+      </p:sp>
+      <p:sp>
+        <p:nvSpPr>
+          <p:cNvPr id="3" name="Notes Placeholder 2"/>
+          <p:cNvSpPr>
+            <a:spLocks noGrp="1"/>
+          </p:cNvSpPr>
+          <p:nvPr>
+            <p:ph type="body" idx="1"/>
+          </p:nvPr>
+        </p:nvSpPr>
+        <p:spPr/>
+        <p:txBody>
+          <a:bodyPr/>
+          <a:lstStyle/>
+          <a:p>
+            <a:r>
+              <a:rPr lang="en-GB" dirty="0"/>
+              <a:t>- First time globally</a:t>
+            </a:r>
+          </a:p>
+          <a:p>
+            <a:r>
+              <a:rPr lang="en-GB" dirty="0"/>
+              <a:t>- Close contact, not STI</a:t>
+            </a:r>
+          </a:p>
+        </p:txBody>
+      </p:sp>
+      <p:sp>
+        <p:nvSpPr>
+          <p:cNvPr id="4" name="Slide Number Placeholder 3"/>
+          <p:cNvSpPr>
+            <a:spLocks noGrp="1"/>
+          </p:cNvSpPr>
+          <p:nvPr>
+            <p:ph type="sldNum" sz="quarter" idx="5"/>
+          </p:nvPr>
+        </p:nvSpPr>
+        <p:spPr/>
+        <p:txBody>
+          <a:bodyPr/>
+          <a:lstStyle/>
+          <a:p>
+            <a:fld id="{F6516755-5A1C-7C49-BFB6-B7711A73FC00}" type="slidenum">
+              <a:rPr lang="en-GB" smtClean="0"/>
+              <a:t>3</a:t>
+            </a:fld>
+            <a:endParaRPr lang="en-GB"/>
+          </a:p>
+        </p:txBody>
+      </p:sp>
+    </p:spTree>
+    <p:extLst>
+      <p:ext uri="{BB962C8B-B14F-4D97-AF65-F5344CB8AC3E}">
+        <p14:creationId xmlns:p14="http://schemas.microsoft.com/office/powerpoint/2010/main" val="3415170302"/>
+      </p:ext>
+    </p:extLst>
+  </p:cSld>
+  <p:clrMapOvr>
+    <a:masterClrMapping/>
+  </p:clrMapOvr>
+</p:notes>
+</file>
+
+<file path=ppt/notesSlides/notesSlide3.xml><?xml version="1.0" encoding="utf-8"?>
+<p:notes xmlns:a="http://schemas.openxmlformats.org/drawingml/2006/main" xmlns:r="http://schemas.openxmlformats.org/officeDocument/2006/relationships" xmlns:p="http://schemas.openxmlformats.org/presentationml/2006/main">
+  <p:cSld>
+    <p:spTree>
+      <p:nvGrpSpPr>
+        <p:cNvPr id="1" name=""/>
+        <p:cNvGrpSpPr/>
+        <p:nvPr/>
+      </p:nvGrpSpPr>
+      <p:grpSpPr>
+        <a:xfrm>
+          <a:off x="0" y="0"/>
+          <a:ext cx="0" cy="0"/>
+          <a:chOff x="0" y="0"/>
+          <a:chExt cx="0" cy="0"/>
+        </a:xfrm>
+      </p:grpSpPr>
+      <p:sp>
+        <p:nvSpPr>
+          <p:cNvPr id="2" name="Slide Image Placeholder 1"/>
+          <p:cNvSpPr>
+            <a:spLocks noGrp="1" noRot="1" noChangeAspect="1"/>
+          </p:cNvSpPr>
+          <p:nvPr>
+            <p:ph type="sldImg"/>
+          </p:nvPr>
+        </p:nvSpPr>
+        <p:spPr/>
+      </p:sp>
+      <p:sp>
+        <p:nvSpPr>
+          <p:cNvPr id="3" name="Notes Placeholder 2"/>
+          <p:cNvSpPr>
+            <a:spLocks noGrp="1"/>
+          </p:cNvSpPr>
+          <p:nvPr>
+            <p:ph type="body" idx="1"/>
+          </p:nvPr>
+        </p:nvSpPr>
+        <p:spPr/>
+        <p:txBody>
+          <a:bodyPr/>
+          <a:lstStyle/>
+          <a:p>
+            <a:r>
+              <a:rPr lang="en-GB" dirty="0"/>
+              <a:t>- but there are so many ways to talk about Mpox: case counts, racial disparities, vaccine availability</a:t>
+            </a:r>
+          </a:p>
+        </p:txBody>
+      </p:sp>
+      <p:sp>
+        <p:nvSpPr>
+          <p:cNvPr id="4" name="Slide Number Placeholder 3"/>
+          <p:cNvSpPr>
+            <a:spLocks noGrp="1"/>
+          </p:cNvSpPr>
+          <p:nvPr>
+            <p:ph type="sldNum" sz="quarter" idx="5"/>
+          </p:nvPr>
+        </p:nvSpPr>
+        <p:spPr/>
+        <p:txBody>
+          <a:bodyPr/>
+          <a:lstStyle/>
+          <a:p>
+            <a:fld id="{F6516755-5A1C-7C49-BFB6-B7711A73FC00}" type="slidenum">
+              <a:rPr lang="en-GB" smtClean="0"/>
+              <a:t>4</a:t>
+            </a:fld>
+            <a:endParaRPr lang="en-GB"/>
+          </a:p>
+        </p:txBody>
+      </p:sp>
+    </p:spTree>
+    <p:extLst>
+      <p:ext uri="{BB962C8B-B14F-4D97-AF65-F5344CB8AC3E}">
+        <p14:creationId xmlns:p14="http://schemas.microsoft.com/office/powerpoint/2010/main" val="1841387807"/>
+      </p:ext>
+    </p:extLst>
+  </p:cSld>
+  <p:clrMapOvr>
+    <a:masterClrMapping/>
+  </p:clrMapOvr>
+</p:notes>
+</file>
+
+<file path=ppt/notesSlides/notesSlide4.xml><?xml version="1.0" encoding="utf-8"?>
+<p:notes xmlns:a="http://schemas.openxmlformats.org/drawingml/2006/main" xmlns:r="http://schemas.openxmlformats.org/officeDocument/2006/relationships" xmlns:p="http://schemas.openxmlformats.org/presentationml/2006/main">
+  <p:cSld>
+    <p:spTree>
+      <p:nvGrpSpPr>
+        <p:cNvPr id="1" name=""/>
+        <p:cNvGrpSpPr/>
+        <p:nvPr/>
+      </p:nvGrpSpPr>
+      <p:grpSpPr>
+        <a:xfrm>
+          <a:off x="0" y="0"/>
+          <a:ext cx="0" cy="0"/>
+          <a:chOff x="0" y="0"/>
+          <a:chExt cx="0" cy="0"/>
+        </a:xfrm>
+      </p:grpSpPr>
+      <p:sp>
+        <p:nvSpPr>
+          <p:cNvPr id="2" name="Slide Image Placeholder 1"/>
+          <p:cNvSpPr>
+            <a:spLocks noGrp="1" noRot="1" noChangeAspect="1"/>
+          </p:cNvSpPr>
+          <p:nvPr>
+            <p:ph type="sldImg"/>
+          </p:nvPr>
+        </p:nvSpPr>
+        <p:spPr/>
+      </p:sp>
+      <p:sp>
+        <p:nvSpPr>
+          <p:cNvPr id="3" name="Notes Placeholder 2"/>
+          <p:cNvSpPr>
+            <a:spLocks noGrp="1"/>
+          </p:cNvSpPr>
+          <p:nvPr>
+            <p:ph type="body" idx="1"/>
+          </p:nvPr>
+        </p:nvSpPr>
+        <p:spPr/>
+        <p:txBody>
+          <a:bodyPr/>
+          <a:lstStyle/>
+          <a:p>
+            <a:r>
+              <a:rPr lang="en-GB" dirty="0"/>
+              <a:t>Explain plot first</a:t>
+            </a:r>
+          </a:p>
+          <a:p>
+            <a:endParaRPr lang="en-GB" dirty="0"/>
+          </a:p>
+          <a:p>
+            <a:r>
+              <a:rPr lang="en-GB" dirty="0"/>
+              <a:t>- this is something that we've seen in politics generally</a:t>
+            </a:r>
+          </a:p>
+        </p:txBody>
+      </p:sp>
+      <p:sp>
+        <p:nvSpPr>
+          <p:cNvPr id="4" name="Slide Number Placeholder 3"/>
+          <p:cNvSpPr>
+            <a:spLocks noGrp="1"/>
+          </p:cNvSpPr>
+          <p:nvPr>
+            <p:ph type="sldNum" sz="quarter" idx="5"/>
+          </p:nvPr>
+        </p:nvSpPr>
+        <p:spPr/>
+        <p:txBody>
+          <a:bodyPr/>
+          <a:lstStyle/>
+          <a:p>
+            <a:fld id="{F6516755-5A1C-7C49-BFB6-B7711A73FC00}" type="slidenum">
+              <a:rPr lang="en-GB" smtClean="0"/>
+              <a:t>5</a:t>
+            </a:fld>
+            <a:endParaRPr lang="en-GB"/>
+          </a:p>
+        </p:txBody>
+      </p:sp>
+    </p:spTree>
+    <p:extLst>
+      <p:ext uri="{BB962C8B-B14F-4D97-AF65-F5344CB8AC3E}">
+        <p14:creationId xmlns:p14="http://schemas.microsoft.com/office/powerpoint/2010/main" val="2697450375"/>
+      </p:ext>
+    </p:extLst>
+  </p:cSld>
+  <p:clrMapOvr>
+    <a:masterClrMapping/>
+  </p:clrMapOvr>
+</p:notes>
+</file>
+
+<file path=ppt/notesSlides/notesSlide5.xml><?xml version="1.0" encoding="utf-8"?>
+<p:notes xmlns:a="http://schemas.openxmlformats.org/drawingml/2006/main" xmlns:r="http://schemas.openxmlformats.org/officeDocument/2006/relationships" xmlns:p="http://schemas.openxmlformats.org/presentationml/2006/main">
+  <p:cSld>
+    <p:spTree>
+      <p:nvGrpSpPr>
+        <p:cNvPr id="1" name=""/>
+        <p:cNvGrpSpPr/>
+        <p:nvPr/>
+      </p:nvGrpSpPr>
+      <p:grpSpPr>
+        <a:xfrm>
+          <a:off x="0" y="0"/>
+          <a:ext cx="0" cy="0"/>
+          <a:chOff x="0" y="0"/>
+          <a:chExt cx="0" cy="0"/>
+        </a:xfrm>
+      </p:grpSpPr>
+      <p:sp>
+        <p:nvSpPr>
+          <p:cNvPr id="2" name="Slide Image Placeholder 1"/>
+          <p:cNvSpPr>
+            <a:spLocks noGrp="1" noRot="1" noChangeAspect="1"/>
+          </p:cNvSpPr>
+          <p:nvPr>
+            <p:ph type="sldImg"/>
+          </p:nvPr>
+        </p:nvSpPr>
+        <p:spPr/>
+      </p:sp>
+      <p:sp>
+        <p:nvSpPr>
+          <p:cNvPr id="3" name="Notes Placeholder 2"/>
+          <p:cNvSpPr>
+            <a:spLocks noGrp="1"/>
+          </p:cNvSpPr>
+          <p:nvPr>
+            <p:ph type="body" idx="1"/>
+          </p:nvPr>
+        </p:nvSpPr>
+        <p:spPr/>
+        <p:txBody>
+          <a:bodyPr/>
+          <a:lstStyle/>
+          <a:p>
+            <a:r>
+              <a:rPr lang="en-GB" dirty="0"/>
+              <a:t>Confounders</a:t>
+            </a:r>
+          </a:p>
+        </p:txBody>
+      </p:sp>
+      <p:sp>
+        <p:nvSpPr>
+          <p:cNvPr id="4" name="Slide Number Placeholder 3"/>
+          <p:cNvSpPr>
+            <a:spLocks noGrp="1"/>
+          </p:cNvSpPr>
+          <p:nvPr>
+            <p:ph type="sldNum" sz="quarter" idx="5"/>
+          </p:nvPr>
+        </p:nvSpPr>
+        <p:spPr/>
+        <p:txBody>
+          <a:bodyPr/>
+          <a:lstStyle/>
+          <a:p>
+            <a:fld id="{F6516755-5A1C-7C49-BFB6-B7711A73FC00}" type="slidenum">
+              <a:rPr lang="en-GB" smtClean="0"/>
               <a:t>12</a:t>
             </a:fld>
             <a:endParaRPr lang="en-GB"/>
@@ -2667,7 +3030,7 @@
 </p:notes>
 </file>
 
-<file path=ppt/notesSlides/notesSlide2.xml><?xml version="1.0" encoding="utf-8"?>
+<file path=ppt/notesSlides/notesSlide6.xml><?xml version="1.0" encoding="utf-8"?>
 <p:notes xmlns:a="http://schemas.openxmlformats.org/drawingml/2006/main" xmlns:r="http://schemas.openxmlformats.org/officeDocument/2006/relationships" xmlns:p="http://schemas.openxmlformats.org/presentationml/2006/main">
   <p:cSld>
     <p:spTree>
@@ -2930,7 +3293,7 @@
           <a:p>
             <a:fld id="{FFCF93F9-D793-604B-8D45-8FF835C37EFF}" type="datetime1">
               <a:rPr lang="en-GB" smtClean="0"/>
-              <a:t>14/01/2025</a:t>
+              <a:t>15/01/2025</a:t>
             </a:fld>
             <a:endParaRPr lang="en-US"/>
           </a:p>
@@ -3094,7 +3457,7 @@
           <a:p>
             <a:fld id="{E9C1A325-C174-B04A-93EC-D21AF063DEB4}" type="datetime1">
               <a:rPr lang="en-GB" smtClean="0"/>
-              <a:t>14/01/2025</a:t>
+              <a:t>15/01/2025</a:t>
             </a:fld>
             <a:endParaRPr lang="en-US"/>
           </a:p>
@@ -3268,7 +3631,7 @@
           <a:p>
             <a:fld id="{174F7340-27C2-D84A-BAE6-F5F9F2C1A0A7}" type="datetime1">
               <a:rPr lang="en-GB" smtClean="0"/>
-              <a:t>14/01/2025</a:t>
+              <a:t>15/01/2025</a:t>
             </a:fld>
             <a:endParaRPr lang="en-US"/>
           </a:p>
@@ -3432,7 +3795,7 @@
           <a:p>
             <a:fld id="{C7DAB917-F978-AA43-8497-2683671F455A}" type="datetime1">
               <a:rPr lang="en-GB" smtClean="0"/>
-              <a:t>14/01/2025</a:t>
+              <a:t>15/01/2025</a:t>
             </a:fld>
             <a:endParaRPr lang="en-US"/>
           </a:p>
@@ -3673,7 +4036,7 @@
           <a:p>
             <a:fld id="{EB5B162C-6580-B64B-B423-12CADBBF2A9F}" type="datetime1">
               <a:rPr lang="en-GB" smtClean="0"/>
-              <a:t>14/01/2025</a:t>
+              <a:t>15/01/2025</a:t>
             </a:fld>
             <a:endParaRPr lang="en-US"/>
           </a:p>
@@ -3954,7 +4317,7 @@
           <a:p>
             <a:fld id="{04258D33-C3E3-3E41-AEF3-FDC86FFCFA1F}" type="datetime1">
               <a:rPr lang="en-GB" smtClean="0"/>
-              <a:t>14/01/2025</a:t>
+              <a:t>15/01/2025</a:t>
             </a:fld>
             <a:endParaRPr lang="en-US"/>
           </a:p>
@@ -4369,7 +4732,7 @@
           <a:p>
             <a:fld id="{C340AE65-69D5-EE49-9D28-6DA4182BBE9E}" type="datetime1">
               <a:rPr lang="en-GB" smtClean="0"/>
-              <a:t>14/01/2025</a:t>
+              <a:t>15/01/2025</a:t>
             </a:fld>
             <a:endParaRPr lang="en-US"/>
           </a:p>
@@ -4482,7 +4845,7 @@
           <a:p>
             <a:fld id="{4533AB1C-E259-1243-A414-7D28EE6ED0DE}" type="datetime1">
               <a:rPr lang="en-GB" smtClean="0"/>
-              <a:t>14/01/2025</a:t>
+              <a:t>15/01/2025</a:t>
             </a:fld>
             <a:endParaRPr lang="en-US"/>
           </a:p>
@@ -4573,7 +4936,7 @@
           <a:p>
             <a:fld id="{EBC6876B-2477-A74E-BE36-AC5117197423}" type="datetime1">
               <a:rPr lang="en-GB" smtClean="0"/>
-              <a:t>14/01/2025</a:t>
+              <a:t>15/01/2025</a:t>
             </a:fld>
             <a:endParaRPr lang="en-US"/>
           </a:p>
@@ -4844,7 +5207,7 @@
           <a:p>
             <a:fld id="{1E5ABA04-3FE1-364C-A414-7AE6D1CA0C30}" type="datetime1">
               <a:rPr lang="en-GB" smtClean="0"/>
-              <a:t>14/01/2025</a:t>
+              <a:t>15/01/2025</a:t>
             </a:fld>
             <a:endParaRPr lang="en-US"/>
           </a:p>
@@ -5092,7 +5455,7 @@
           <a:p>
             <a:fld id="{0EA32DD1-8F23-4949-A8A0-DBB7819CA969}" type="datetime1">
               <a:rPr lang="en-GB" smtClean="0"/>
-              <a:t>14/01/2025</a:t>
+              <a:t>15/01/2025</a:t>
             </a:fld>
             <a:endParaRPr lang="en-US"/>
           </a:p>
@@ -5299,7 +5662,7 @@
           <a:p>
             <a:fld id="{07B6D07A-5444-8A45-BF1A-8A83B3198822}" type="datetime1">
               <a:rPr lang="en-GB" smtClean="0"/>
-              <a:t>14/01/2025</a:t>
+              <a:t>15/01/2025</a:t>
             </a:fld>
             <a:endParaRPr lang="en-US"/>
           </a:p>
@@ -6156,7 +6519,7 @@
           <p:nvPr/>
         </p:nvPicPr>
         <p:blipFill>
-          <a:blip r:embed="rId2"/>
+          <a:blip r:embed="rId3"/>
           <a:stretch>
             <a:fillRect/>
           </a:stretch>
@@ -6186,7 +6549,7 @@
           <p:nvPr/>
         </p:nvPicPr>
         <p:blipFill>
-          <a:blip r:embed="rId3">
+          <a:blip r:embed="rId4">
             <a:extLst>
               <a:ext uri="{28A0092B-C50C-407E-A947-70E740481C1C}">
                 <a14:useLocalDpi xmlns:a14="http://schemas.microsoft.com/office/drawing/2010/main" val="0"/>
@@ -6233,7 +6596,7 @@
           <p:nvPr/>
         </p:nvPicPr>
         <p:blipFill>
-          <a:blip r:embed="rId4">
+          <a:blip r:embed="rId5">
             <a:extLst>
               <a:ext uri="{28A0092B-C50C-407E-A947-70E740481C1C}">
                 <a14:useLocalDpi xmlns:a14="http://schemas.microsoft.com/office/drawing/2010/main" val="0"/>
@@ -22307,10 +22670,10 @@
             </a:pathLst>
           </a:custGeom>
           <a:blipFill>
-            <a:blip r:embed="rId2">
+            <a:blip r:embed="rId3">
               <a:extLst>
                 <a:ext uri="{96DAC541-7B7A-43D3-8B79-37D633B846F1}">
-                  <asvg:svgBlip xmlns:asvg="http://schemas.microsoft.com/office/drawing/2016/SVG/main" r:embed="rId3"/>
+                  <asvg:svgBlip xmlns:asvg="http://schemas.microsoft.com/office/drawing/2016/SVG/main" r:embed="rId4"/>
                 </a:ext>
               </a:extLst>
             </a:blip>
@@ -22578,10 +22941,10 @@
             </a:pathLst>
           </a:custGeom>
           <a:blipFill>
-            <a:blip r:embed="rId2">
+            <a:blip r:embed="rId3">
               <a:extLst>
                 <a:ext uri="{96DAC541-7B7A-43D3-8B79-37D633B846F1}">
-                  <asvg:svgBlip xmlns:asvg="http://schemas.microsoft.com/office/drawing/2016/SVG/main" r:embed="rId3"/>
+                  <asvg:svgBlip xmlns:asvg="http://schemas.microsoft.com/office/drawing/2016/SVG/main" r:embed="rId4"/>
                 </a:ext>
               </a:extLst>
             </a:blip>
@@ -22633,10 +22996,10 @@
             <p:nvPr/>
           </p:nvPicPr>
           <p:blipFill rotWithShape="1">
-            <a:blip r:embed="rId4">
+            <a:blip r:embed="rId5">
               <a:extLst>
                 <a:ext uri="{96DAC541-7B7A-43D3-8B79-37D633B846F1}">
-                  <asvg:svgBlip xmlns:asvg="http://schemas.microsoft.com/office/drawing/2016/SVG/main" r:embed="rId5"/>
+                  <asvg:svgBlip xmlns:asvg="http://schemas.microsoft.com/office/drawing/2016/SVG/main" r:embed="rId6"/>
                 </a:ext>
               </a:extLst>
             </a:blip>
@@ -22765,10 +23128,10 @@
             <p:nvPr/>
           </p:nvPicPr>
           <p:blipFill>
-            <a:blip r:embed="rId6">
+            <a:blip r:embed="rId7">
               <a:extLst>
                 <a:ext uri="{96DAC541-7B7A-43D3-8B79-37D633B846F1}">
-                  <asvg:svgBlip xmlns:asvg="http://schemas.microsoft.com/office/drawing/2016/SVG/main" r:embed="rId7"/>
+                  <asvg:svgBlip xmlns:asvg="http://schemas.microsoft.com/office/drawing/2016/SVG/main" r:embed="rId8"/>
                 </a:ext>
               </a:extLst>
             </a:blip>
@@ -22884,7 +23247,7 @@
             <p:nvPr/>
           </p:nvPicPr>
           <p:blipFill>
-            <a:blip r:embed="rId8"/>
+            <a:blip r:embed="rId9"/>
             <a:stretch>
               <a:fillRect/>
             </a:stretch>
@@ -23262,10 +23625,10 @@
             </a:pathLst>
           </a:custGeom>
           <a:blipFill>
-            <a:blip r:embed="rId2">
+            <a:blip r:embed="rId3">
               <a:extLst>
                 <a:ext uri="{96DAC541-7B7A-43D3-8B79-37D633B846F1}">
-                  <asvg:svgBlip xmlns:asvg="http://schemas.microsoft.com/office/drawing/2016/SVG/main" r:embed="rId3"/>
+                  <asvg:svgBlip xmlns:asvg="http://schemas.microsoft.com/office/drawing/2016/SVG/main" r:embed="rId4"/>
                 </a:ext>
               </a:extLst>
             </a:blip>
@@ -23327,10 +23690,10 @@
             </a:pathLst>
           </a:custGeom>
           <a:blipFill>
-            <a:blip r:embed="rId2">
+            <a:blip r:embed="rId3">
               <a:extLst>
                 <a:ext uri="{96DAC541-7B7A-43D3-8B79-37D633B846F1}">
-                  <asvg:svgBlip xmlns:asvg="http://schemas.microsoft.com/office/drawing/2016/SVG/main" r:embed="rId3"/>
+                  <asvg:svgBlip xmlns:asvg="http://schemas.microsoft.com/office/drawing/2016/SVG/main" r:embed="rId4"/>
                 </a:ext>
               </a:extLst>
             </a:blip>
@@ -24380,7 +24743,7 @@
           </p:nvPr>
         </p:nvPicPr>
         <p:blipFill>
-          <a:blip r:embed="rId4"/>
+          <a:blip r:embed="rId5"/>
           <a:stretch>
             <a:fillRect/>
           </a:stretch>
@@ -24474,10 +24837,10 @@
             </a:pathLst>
           </a:custGeom>
           <a:blipFill>
-            <a:blip r:embed="rId5">
+            <a:blip r:embed="rId6">
               <a:extLst>
                 <a:ext uri="{96DAC541-7B7A-43D3-8B79-37D633B846F1}">
-                  <asvg:svgBlip xmlns:asvg="http://schemas.microsoft.com/office/drawing/2016/SVG/main" r:embed="rId6"/>
+                  <asvg:svgBlip xmlns:asvg="http://schemas.microsoft.com/office/drawing/2016/SVG/main" r:embed="rId7"/>
                 </a:ext>
               </a:extLst>
             </a:blip>
